--- a/Reporte 121026.pptx
+++ b/Reporte 121026.pptx
@@ -6419,7 +6419,7 @@
                 <a:latin typeface="Montserrat Black"/>
                 <a:sym typeface="Arial"/>
               </a:rPr>
-              <a:t>Elaborado: 0</a:t>
+              <a:t>Elaborado: </a:t>
             </a:r>
             <a:r>
               <a:rPr lang="es-MX" sz="1600" dirty="0">
@@ -6427,7 +6427,7 @@
                   <a:srgbClr val="D8AB72"/>
                 </a:solidFill>
               </a:rPr>
-              <a:t>9</a:t>
+              <a:t>12</a:t>
             </a:r>
             <a:r>
               <a:rPr kumimoji="0" lang="es-MX" sz="1600" b="0" i="0" u="none" strike="noStrike" kern="0" cap="none" spc="0" normalizeH="0" baseline="0" noProof="0" dirty="0">
@@ -7284,10 +7284,10 @@
       </p:sp>
       <p:pic>
         <p:nvPicPr>
-          <p:cNvPr id="4" name="Imagen 3">
+          <p:cNvPr id="3" name="Imagen 2">
             <a:extLst>
               <a:ext uri="{FF2B5EF4-FFF2-40B4-BE49-F238E27FC236}">
-                <a16:creationId xmlns:a16="http://schemas.microsoft.com/office/drawing/2014/main" id="{F1A37C98-EEE9-F49C-5451-065D0EDCAE2C}"/>
+                <a16:creationId xmlns:a16="http://schemas.microsoft.com/office/drawing/2014/main" id="{EDAA954B-2411-BF3B-23AB-4E5667F56F8F}"/>
               </a:ext>
             </a:extLst>
           </p:cNvPr>
@@ -7304,8 +7304,8 @@
         </p:blipFill>
         <p:spPr>
           <a:xfrm>
-            <a:off x="0" y="994512"/>
-            <a:ext cx="9144000" cy="3297352"/>
+            <a:off x="0" y="966871"/>
+            <a:ext cx="9144000" cy="3352634"/>
           </a:xfrm>
           <a:prstGeom prst="rect">
             <a:avLst/>
@@ -7398,10 +7398,10 @@
       </p:sp>
       <p:pic>
         <p:nvPicPr>
-          <p:cNvPr id="5" name="Imagen 4">
+          <p:cNvPr id="3" name="Imagen 2">
             <a:extLst>
               <a:ext uri="{FF2B5EF4-FFF2-40B4-BE49-F238E27FC236}">
-                <a16:creationId xmlns:a16="http://schemas.microsoft.com/office/drawing/2014/main" id="{419792DA-B478-5835-F769-1A27026AA1D3}"/>
+                <a16:creationId xmlns:a16="http://schemas.microsoft.com/office/drawing/2014/main" id="{6B611FDA-5A10-D5F2-B90F-DB81A0D69273}"/>
               </a:ext>
             </a:extLst>
           </p:cNvPr>
@@ -7418,8 +7418,8 @@
         </p:blipFill>
         <p:spPr>
           <a:xfrm>
-            <a:off x="0" y="1423159"/>
-            <a:ext cx="9144000" cy="2440057"/>
+            <a:off x="0" y="1418190"/>
+            <a:ext cx="9144000" cy="2449996"/>
           </a:xfrm>
           <a:prstGeom prst="rect">
             <a:avLst/>
@@ -7512,10 +7512,10 @@
       </p:sp>
       <p:pic>
         <p:nvPicPr>
-          <p:cNvPr id="4" name="Imagen 3">
+          <p:cNvPr id="2" name="Imagen 1">
             <a:extLst>
               <a:ext uri="{FF2B5EF4-FFF2-40B4-BE49-F238E27FC236}">
-                <a16:creationId xmlns:a16="http://schemas.microsoft.com/office/drawing/2014/main" id="{70852776-FBA4-FE1C-8FAD-A20F50787456}"/>
+                <a16:creationId xmlns:a16="http://schemas.microsoft.com/office/drawing/2014/main" id="{335DA850-2412-FC74-74C3-1B79753BA203}"/>
               </a:ext>
             </a:extLst>
           </p:cNvPr>
@@ -7622,10 +7622,10 @@
       </p:sp>
       <p:pic>
         <p:nvPicPr>
-          <p:cNvPr id="4" name="Imagen 3">
+          <p:cNvPr id="3" name="Imagen 2">
             <a:extLst>
               <a:ext uri="{FF2B5EF4-FFF2-40B4-BE49-F238E27FC236}">
-                <a16:creationId xmlns:a16="http://schemas.microsoft.com/office/drawing/2014/main" id="{41984275-6BDF-1274-6F02-571D3095B8D0}"/>
+                <a16:creationId xmlns:a16="http://schemas.microsoft.com/office/drawing/2014/main" id="{0D76F095-E181-96B8-BCB5-14827A323256}"/>
               </a:ext>
             </a:extLst>
           </p:cNvPr>
@@ -7642,8 +7642,38 @@
         </p:blipFill>
         <p:spPr>
           <a:xfrm>
-            <a:off x="0" y="1133791"/>
-            <a:ext cx="9144000" cy="3018794"/>
+            <a:off x="1296987" y="521758"/>
+            <a:ext cx="6477000" cy="1333500"/>
+          </a:xfrm>
+          <a:prstGeom prst="rect">
+            <a:avLst/>
+          </a:prstGeom>
+        </p:spPr>
+      </p:pic>
+      <p:pic>
+        <p:nvPicPr>
+          <p:cNvPr id="6" name="Imagen 5">
+            <a:extLst>
+              <a:ext uri="{FF2B5EF4-FFF2-40B4-BE49-F238E27FC236}">
+                <a16:creationId xmlns:a16="http://schemas.microsoft.com/office/drawing/2014/main" id="{91F80703-3D79-954D-447E-B67B961E46D6}"/>
+              </a:ext>
+            </a:extLst>
+          </p:cNvPr>
+          <p:cNvPicPr>
+            <a:picLocks noChangeAspect="1"/>
+          </p:cNvPicPr>
+          <p:nvPr/>
+        </p:nvPicPr>
+        <p:blipFill>
+          <a:blip r:embed="rId4"/>
+          <a:stretch>
+            <a:fillRect/>
+          </a:stretch>
+        </p:blipFill>
+        <p:spPr>
+          <a:xfrm>
+            <a:off x="0" y="2020905"/>
+            <a:ext cx="9144000" cy="2109690"/>
           </a:xfrm>
           <a:prstGeom prst="rect">
             <a:avLst/>
@@ -7736,10 +7766,10 @@
       </p:sp>
       <p:pic>
         <p:nvPicPr>
-          <p:cNvPr id="3" name="Imagen 2">
+          <p:cNvPr id="4" name="Imagen 3">
             <a:extLst>
               <a:ext uri="{FF2B5EF4-FFF2-40B4-BE49-F238E27FC236}">
-                <a16:creationId xmlns:a16="http://schemas.microsoft.com/office/drawing/2014/main" id="{3BC08A8A-C1F3-432A-F4CC-1B1EB78D20E8}"/>
+                <a16:creationId xmlns:a16="http://schemas.microsoft.com/office/drawing/2014/main" id="{B6A437BD-57DA-D2A9-4817-B2D3AFEAE8CC}"/>
               </a:ext>
             </a:extLst>
           </p:cNvPr>
@@ -7756,8 +7786,8 @@
         </p:blipFill>
         <p:spPr>
           <a:xfrm>
-            <a:off x="0" y="985590"/>
-            <a:ext cx="9144000" cy="3315195"/>
+            <a:off x="0" y="964387"/>
+            <a:ext cx="9144000" cy="3357601"/>
           </a:xfrm>
           <a:prstGeom prst="rect">
             <a:avLst/>
@@ -7850,10 +7880,10 @@
       </p:sp>
       <p:pic>
         <p:nvPicPr>
-          <p:cNvPr id="3" name="Imagen 2">
+          <p:cNvPr id="2" name="Imagen 1">
             <a:extLst>
               <a:ext uri="{FF2B5EF4-FFF2-40B4-BE49-F238E27FC236}">
-                <a16:creationId xmlns:a16="http://schemas.microsoft.com/office/drawing/2014/main" id="{A9C769C7-15C1-54D2-B875-0834E5847787}"/>
+                <a16:creationId xmlns:a16="http://schemas.microsoft.com/office/drawing/2014/main" id="{13CBCA0F-373D-A017-52B5-95ED999F0F68}"/>
               </a:ext>
             </a:extLst>
           </p:cNvPr>
@@ -7870,7 +7900,7 @@
         </p:blipFill>
         <p:spPr>
           <a:xfrm>
-            <a:off x="1143000" y="914940"/>
+            <a:off x="1106488" y="954107"/>
             <a:ext cx="6858000" cy="3456495"/>
           </a:xfrm>
           <a:prstGeom prst="rect">
@@ -7964,10 +7994,10 @@
       </p:sp>
       <p:pic>
         <p:nvPicPr>
-          <p:cNvPr id="3" name="Imagen 2">
+          <p:cNvPr id="2" name="Imagen 1">
             <a:extLst>
               <a:ext uri="{FF2B5EF4-FFF2-40B4-BE49-F238E27FC236}">
-                <a16:creationId xmlns:a16="http://schemas.microsoft.com/office/drawing/2014/main" id="{3A8C2E2C-D0CB-CEB0-BEC9-5E2555881441}"/>
+                <a16:creationId xmlns:a16="http://schemas.microsoft.com/office/drawing/2014/main" id="{A44BFF1F-0481-0600-E30C-7830649FBECD}"/>
               </a:ext>
             </a:extLst>
           </p:cNvPr>
@@ -7984,7 +8014,7 @@
         </p:blipFill>
         <p:spPr>
           <a:xfrm>
-            <a:off x="1143000" y="914940"/>
+            <a:off x="1106488" y="914940"/>
             <a:ext cx="6858000" cy="3456495"/>
           </a:xfrm>
           <a:prstGeom prst="rect">
@@ -8082,10 +8112,10 @@
       </p:sp>
       <p:pic>
         <p:nvPicPr>
-          <p:cNvPr id="3" name="Imagen 2">
+          <p:cNvPr id="4" name="Imagen 3">
             <a:extLst>
               <a:ext uri="{FF2B5EF4-FFF2-40B4-BE49-F238E27FC236}">
-                <a16:creationId xmlns:a16="http://schemas.microsoft.com/office/drawing/2014/main" id="{D0EFC6B5-9E35-717E-9D65-4F5B731F0139}"/>
+                <a16:creationId xmlns:a16="http://schemas.microsoft.com/office/drawing/2014/main" id="{3DDB70C1-219D-0A7B-BEAE-743428E72471}"/>
               </a:ext>
             </a:extLst>
           </p:cNvPr>
@@ -8102,8 +8132,8 @@
         </p:blipFill>
         <p:spPr>
           <a:xfrm>
-            <a:off x="1885950" y="1785938"/>
-            <a:ext cx="5372100" cy="1714500"/>
+            <a:off x="2962275" y="942975"/>
+            <a:ext cx="3219450" cy="3257550"/>
           </a:xfrm>
           <a:prstGeom prst="rect">
             <a:avLst/>

--- a/Reporte 121026.pptx
+++ b/Reporte 121026.pptx
@@ -6574,10 +6574,10 @@
       </p:sp>
       <p:pic>
         <p:nvPicPr>
-          <p:cNvPr id="5" name="Imagen 4">
+          <p:cNvPr id="4" name="Imagen 3">
             <a:extLst>
               <a:ext uri="{FF2B5EF4-FFF2-40B4-BE49-F238E27FC236}">
-                <a16:creationId xmlns:a16="http://schemas.microsoft.com/office/drawing/2014/main" id="{CCACAA33-35BF-A069-1756-099DC1FE3063}"/>
+                <a16:creationId xmlns:a16="http://schemas.microsoft.com/office/drawing/2014/main" id="{F5F75A67-5586-12EA-73F5-093CB18C2106}"/>
               </a:ext>
             </a:extLst>
           </p:cNvPr>
@@ -6594,8 +6594,8 @@
         </p:blipFill>
         <p:spPr>
           <a:xfrm>
-            <a:off x="0" y="1013864"/>
-            <a:ext cx="9144000" cy="3360572"/>
+            <a:off x="0" y="943277"/>
+            <a:ext cx="9144000" cy="3399822"/>
           </a:xfrm>
           <a:prstGeom prst="rect">
             <a:avLst/>
@@ -6680,10 +6680,10 @@
       </p:sp>
       <p:pic>
         <p:nvPicPr>
-          <p:cNvPr id="3" name="Imagen 2">
+          <p:cNvPr id="4" name="Imagen 3">
             <a:extLst>
               <a:ext uri="{FF2B5EF4-FFF2-40B4-BE49-F238E27FC236}">
-                <a16:creationId xmlns:a16="http://schemas.microsoft.com/office/drawing/2014/main" id="{D9941960-78EA-D1E9-4855-15A7EB9364C2}"/>
+                <a16:creationId xmlns:a16="http://schemas.microsoft.com/office/drawing/2014/main" id="{79266257-D1FB-7130-BC5C-4D5D40E44AC1}"/>
               </a:ext>
             </a:extLst>
           </p:cNvPr>
@@ -6700,8 +6700,8 @@
         </p:blipFill>
         <p:spPr>
           <a:xfrm>
-            <a:off x="0" y="1313059"/>
-            <a:ext cx="9144000" cy="2660257"/>
+            <a:off x="0" y="1312003"/>
+            <a:ext cx="9144000" cy="2662369"/>
           </a:xfrm>
           <a:prstGeom prst="rect">
             <a:avLst/>
@@ -6786,10 +6786,10 @@
       </p:sp>
       <p:pic>
         <p:nvPicPr>
-          <p:cNvPr id="4" name="Imagen 3">
+          <p:cNvPr id="5" name="Imagen 4">
             <a:extLst>
               <a:ext uri="{FF2B5EF4-FFF2-40B4-BE49-F238E27FC236}">
-                <a16:creationId xmlns:a16="http://schemas.microsoft.com/office/drawing/2014/main" id="{778A52D7-6C8B-5494-07A8-D0B97F7CB670}"/>
+                <a16:creationId xmlns:a16="http://schemas.microsoft.com/office/drawing/2014/main" id="{85844061-38D0-580F-EF84-BBD84C768051}"/>
               </a:ext>
             </a:extLst>
           </p:cNvPr>
@@ -6806,8 +6806,8 @@
         </p:blipFill>
         <p:spPr>
           <a:xfrm>
-            <a:off x="0" y="734328"/>
-            <a:ext cx="9144000" cy="3817719"/>
+            <a:off x="0" y="696594"/>
+            <a:ext cx="9144000" cy="3893188"/>
           </a:xfrm>
           <a:prstGeom prst="rect">
             <a:avLst/>
@@ -6892,10 +6892,10 @@
       </p:sp>
       <p:pic>
         <p:nvPicPr>
-          <p:cNvPr id="3" name="Imagen 2">
+          <p:cNvPr id="4" name="Imagen 3">
             <a:extLst>
               <a:ext uri="{FF2B5EF4-FFF2-40B4-BE49-F238E27FC236}">
-                <a16:creationId xmlns:a16="http://schemas.microsoft.com/office/drawing/2014/main" id="{1A825D44-9A71-B935-08A7-F6BC2585CED7}"/>
+                <a16:creationId xmlns:a16="http://schemas.microsoft.com/office/drawing/2014/main" id="{AABF67A7-F00E-18A7-75DB-C590A731776D}"/>
               </a:ext>
             </a:extLst>
           </p:cNvPr>
@@ -6912,8 +6912,8 @@
         </p:blipFill>
         <p:spPr>
           <a:xfrm>
-            <a:off x="-6725" y="1259027"/>
-            <a:ext cx="9144000" cy="2768321"/>
+            <a:off x="0" y="1331839"/>
+            <a:ext cx="9144000" cy="2622698"/>
           </a:xfrm>
           <a:prstGeom prst="rect">
             <a:avLst/>
@@ -6998,10 +6998,10 @@
       </p:sp>
       <p:pic>
         <p:nvPicPr>
-          <p:cNvPr id="3" name="Imagen 2">
+          <p:cNvPr id="7" name="Imagen 6">
             <a:extLst>
               <a:ext uri="{FF2B5EF4-FFF2-40B4-BE49-F238E27FC236}">
-                <a16:creationId xmlns:a16="http://schemas.microsoft.com/office/drawing/2014/main" id="{7163E0D4-ACFB-9BCA-D211-91D1388EC387}"/>
+                <a16:creationId xmlns:a16="http://schemas.microsoft.com/office/drawing/2014/main" id="{1D555DCF-A241-A5A3-4DC4-256B3EB43B08}"/>
               </a:ext>
             </a:extLst>
           </p:cNvPr>
@@ -7018,8 +7018,8 @@
         </p:blipFill>
         <p:spPr>
           <a:xfrm>
-            <a:off x="0" y="682669"/>
-            <a:ext cx="9144000" cy="3921037"/>
+            <a:off x="0" y="703321"/>
+            <a:ext cx="9144000" cy="3879734"/>
           </a:xfrm>
           <a:prstGeom prst="rect">
             <a:avLst/>
@@ -7110,10 +7110,10 @@
       </p:sp>
       <p:pic>
         <p:nvPicPr>
-          <p:cNvPr id="3" name="Imagen 2">
+          <p:cNvPr id="4" name="Imagen 3">
             <a:extLst>
               <a:ext uri="{FF2B5EF4-FFF2-40B4-BE49-F238E27FC236}">
-                <a16:creationId xmlns:a16="http://schemas.microsoft.com/office/drawing/2014/main" id="{B87E379D-F9A8-D88F-9C8B-FE6F5343F171}"/>
+                <a16:creationId xmlns:a16="http://schemas.microsoft.com/office/drawing/2014/main" id="{612BB0A5-593E-BA5D-68C7-880BF1B9AD7F}"/>
               </a:ext>
             </a:extLst>
           </p:cNvPr>
@@ -7130,8 +7130,8 @@
         </p:blipFill>
         <p:spPr>
           <a:xfrm>
-            <a:off x="0" y="751682"/>
-            <a:ext cx="9144000" cy="3783011"/>
+            <a:off x="0" y="1030993"/>
+            <a:ext cx="9144000" cy="3224389"/>
           </a:xfrm>
           <a:prstGeom prst="rect">
             <a:avLst/>
